--- a/output/drafts/Rentify_v6_slide14_grow.pptx
+++ b/output/drafts/Rentify_v6_slide14_grow.pptx
@@ -503,7 +503,7 @@
             <a:r>
               <a:rPr lang="en-US" dirty="0"/>
               <a:t>[Appendix — Q&amp;A backup for the go-to-market slide]
-Here is our growth plan. We start now with ten pilot shops in Phnom Penh, found through shop visits and Facebook seller groups. In 2027 we launch publicly with KHQR payments and reach about 60 paying shops. In year two, shops bring their own buyers through their storefront links and we grow to about 420. In year three, referrals and partners take us to about 1,100. We break even at about 1,900 paying shops — only 3% of the stores we target.
+Here is our growth plan. We start now with ten pilot shops in Phnom Penh, found through shop visits and Facebook seller groups. In 2027 we launch publicly with KHQR payments and reach about 60 paying shops. In year two, shops bring their own buyers through their storefront links and we grow to about 420. In year three, referrals and partners take us to about 1,100. We break even at about 670 paying shops — around 1% of the stores we target — so we turn profitable during Year 2.
 (Q&amp;A: numbers are yearly averages from our model. The pilot passes if 7 of 10 shops stay active, stock stays 99% accurate, and 6 of 10 will pay. Marketplace commission starts when online payments launch.)</a:t>
             </a:r>
             <a:endParaRPr lang="en-US" dirty="0"/>
@@ -910,7 +910,7 @@
                 <a:ea typeface="Arial" pitchFamily="34" charset="-122"/>
                 <a:cs typeface="Arial" pitchFamily="34" charset="-120"/>
               </a:rPr>
-              <a:t>From 10 shops to break-even</a:t>
+              <a:t>From 10 shops to profit</a:t>
             </a:r>
             <a:endParaRPr lang="en-US" sz="3200" dirty="0"/>
           </a:p>
@@ -1938,7 +1938,7 @@
                 <a:ea typeface="Arial" pitchFamily="34" charset="-122"/>
                 <a:cs typeface="Arial" pitchFamily="34" charset="-120"/>
               </a:rPr>
-              <a:t>GOAL</a:t>
+              <a:t>YEAR 3 PROFIT</a:t>
             </a:r>
             <a:endParaRPr lang="en-US" sz="1050" dirty="0"/>
           </a:p>
@@ -1977,7 +1977,7 @@
                 <a:ea typeface="Arial" pitchFamily="34" charset="-122"/>
                 <a:cs typeface="Arial" pitchFamily="34" charset="-120"/>
               </a:rPr>
-              <a:t>1,895</a:t>
+              <a:t>+$22K</a:t>
             </a:r>
             <a:endParaRPr lang="en-US" sz="3400" dirty="0"/>
           </a:p>
@@ -2016,7 +2016,7 @@
                 <a:ea typeface="Arial" pitchFamily="34" charset="-122"/>
                 <a:cs typeface="Arial" pitchFamily="34" charset="-120"/>
               </a:rPr>
-              <a:t>shops = break-even</a:t>
+              <a:t>net result</a:t>
             </a:r>
             <a:endParaRPr lang="en-US" sz="1250" dirty="0"/>
           </a:p>
@@ -2099,7 +2099,7 @@
                 <a:ea typeface="Arial" pitchFamily="34" charset="-122"/>
                 <a:cs typeface="Arial" pitchFamily="34" charset="-120"/>
               </a:rPr>
-              <a:t>Only 3% of our market</a:t>
+              <a:t>Break-even at ~670 shops</a:t>
             </a:r>
             <a:endParaRPr lang="en-US" sz="1100" dirty="0"/>
           </a:p>

--- a/output/drafts/Rentify_v6_slide14_grow.pptx
+++ b/output/drafts/Rentify_v6_slide14_grow.pptx
@@ -503,7 +503,7 @@
             <a:r>
               <a:rPr lang="en-US" dirty="0"/>
               <a:t>[Appendix — Q&amp;A backup for the go-to-market slide]
-Here is our growth plan. We start now with ten pilot shops in Phnom Penh, found through shop visits and Facebook seller groups. In 2027 we launch publicly with KHQR payments and reach about 60 paying shops. In year two, shops bring their own buyers through their storefront links and we grow to about 420. In year three, referrals and partners take us to about 1,100. We break even at about 670 paying shops — around 1% of the stores we target — so we turn profitable during Year 2.
+Here is our growth plan. We start now with ten pilot shops in Phnom Penh, found through shop visits and Facebook seller groups. In 2027 we launch publicly with KHQR payments and reach about 60 paying shops. In year two, shops bring their own buyers through their storefront links and we grow to about 420. In year three, referrals and partners take us to about 1,100. We break even at about 1,040 paying shops — under 2% of the stores we target — so we turn profitable in Year 3.
 (Q&amp;A: numbers are yearly averages from our model. The pilot passes if 7 of 10 shops stay active, stock stays 99% accurate, and 6 of 10 will pay. Marketplace commission starts when online payments launch.)</a:t>
             </a:r>
             <a:endParaRPr lang="en-US" dirty="0"/>
@@ -1977,7 +1977,7 @@
                 <a:ea typeface="Arial" pitchFamily="34" charset="-122"/>
                 <a:cs typeface="Arial" pitchFamily="34" charset="-120"/>
               </a:rPr>
-              <a:t>+$22K</a:t>
+              <a:t>+$4K</a:t>
             </a:r>
             <a:endParaRPr lang="en-US" sz="3400" dirty="0"/>
           </a:p>
@@ -2099,7 +2099,7 @@
                 <a:ea typeface="Arial" pitchFamily="34" charset="-122"/>
                 <a:cs typeface="Arial" pitchFamily="34" charset="-120"/>
               </a:rPr>
-              <a:t>Break-even at ~670 shops</a:t>
+              <a:t>Break-even at ~1,040 shops</a:t>
             </a:r>
             <a:endParaRPr lang="en-US" sz="1100" dirty="0"/>
           </a:p>

--- a/output/drafts/Rentify_v6_slide14_grow.pptx
+++ b/output/drafts/Rentify_v6_slide14_grow.pptx
@@ -503,7 +503,7 @@
             <a:r>
               <a:rPr lang="en-US" dirty="0"/>
               <a:t>[Appendix — Q&amp;A backup for the go-to-market slide]
-Here is our growth plan. We start now with ten pilot shops in Phnom Penh, found through shop visits and Facebook seller groups. In 2027 we launch publicly with KHQR payments and reach about 60 paying shops. In year two, shops bring their own buyers through their storefront links and we grow to about 420. In year three, referrals and partners take us to about 1,100. We break even at about 1,040 paying shops — under 2% of the stores we target — so we turn profitable in Year 3.
+Here is our growth plan. We start now with ten pilot shops in Phnom Penh, found through shop visits and Facebook seller groups. In 2027 we launch publicly with KHQR payments and reach about 60 paying shops. In year two, shops bring their own buyers through their storefront links and we grow to about 420. In year three, referrals and partners take us to about 1,100. About 110 paying shops cover our running costs, so we pay for ourselves from Year 1; the team works unpaid that year and is then paid from profit, about 420 dollars a month each by Year 3.
 (Q&amp;A: numbers are yearly averages from our model. The pilot passes if 7 of 10 shops stay active, stock stays 99% accurate, and 6 of 10 will pay. Marketplace commission starts when online payments launch.)</a:t>
             </a:r>
             <a:endParaRPr lang="en-US" dirty="0"/>
@@ -1938,7 +1938,7 @@
                 <a:ea typeface="Arial" pitchFamily="34" charset="-122"/>
                 <a:cs typeface="Arial" pitchFamily="34" charset="-120"/>
               </a:rPr>
-              <a:t>YEAR 3 PROFIT</a:t>
+              <a:t>YEAR 3</a:t>
             </a:r>
             <a:endParaRPr lang="en-US" sz="1050" dirty="0"/>
           </a:p>
@@ -1977,7 +1977,7 @@
                 <a:ea typeface="Arial" pitchFamily="34" charset="-122"/>
                 <a:cs typeface="Arial" pitchFamily="34" charset="-120"/>
               </a:rPr>
-              <a:t>+$4K</a:t>
+              <a:t>~$420</a:t>
             </a:r>
             <a:endParaRPr lang="en-US" sz="3400" dirty="0"/>
           </a:p>
@@ -2016,7 +2016,7 @@
                 <a:ea typeface="Arial" pitchFamily="34" charset="-122"/>
                 <a:cs typeface="Arial" pitchFamily="34" charset="-120"/>
               </a:rPr>
-              <a:t>net result</a:t>
+              <a:t>per founder / month</a:t>
             </a:r>
             <a:endParaRPr lang="en-US" sz="1250" dirty="0"/>
           </a:p>
@@ -2099,7 +2099,7 @@
                 <a:ea typeface="Arial" pitchFamily="34" charset="-122"/>
                 <a:cs typeface="Arial" pitchFamily="34" charset="-120"/>
               </a:rPr>
-              <a:t>Break-even at ~1,040 shops</a:t>
+              <a:t>Paid from profit; $18.6K kept</a:t>
             </a:r>
             <a:endParaRPr lang="en-US" sz="1100" dirty="0"/>
           </a:p>
